--- a/public/fun/pack/pptx/reviewpro/보장점검양식프리미엄_29_부모님점검_코냑크림.pptx
+++ b/public/fun/pack/pptx/reviewpro/보장점검양식프리미엄_29_부모님점검_코냑크림.pptx
@@ -112,12 +112,12 @@
   <p:extLst>
     <p:ext uri="{521415D9-36F7-43E2-AB2F-B90AF26B5E84}">
       <p14:sectionLst xmlns:p14="http://schemas.microsoft.com/office/powerpoint/2010/main">
-        <p14:section name="시작" id="{DF467638-520A-4169-986C-C68C8852D153}">
+        <p14:section name="시작" id="{50482D3B-D0E1-492D-A30B-60B44A775D35}">
           <p14:sldIdLst>
             <p14:sldId id="256"/>
           </p14:sldIdLst>
         </p14:section>
-        <p14:section name="본문" id="{5E508D61-01D3-4A6C-985A-C6C75517B545}">
+        <p14:section name="본문" id="{F03A93E5-D0E4-464A-B251-9B4C9FD8A5D5}">
           <p14:sldIdLst>
             <p14:sldId id="257"/>
             <p14:sldId id="258"/>
@@ -1694,7 +1694,7 @@
             </a:lvl1pPr>
           </a:lstStyle>
           <a:p>
-            <a:fld id="{B892C011-5E6D-49F7-9ECC-F9CFC59514D9}" type="slidenum">
+            <a:fld id="{CC3BE867-14C8-4164-B6C0-8F2BC7A11894}" type="slidenum">
               <a:rPr lang="en-US"/>
               <a:t>‹#›</a:t>
             </a:fld>
@@ -2823,7 +2823,7 @@
             </a:lvl1pPr>
           </a:lstStyle>
           <a:p>
-            <a:fld id="{A90AF562-8C9B-45F7-8857-A4BC7466DD03}" type="slidenum">
+            <a:fld id="{EED1FBF5-D452-4F9D-A55C-1480D0654086}" type="slidenum">
               <a:rPr lang="en-US"/>
               <a:t>‹#›</a:t>
             </a:fld>
@@ -3833,7 +3833,7 @@
             </a:lvl1pPr>
           </a:lstStyle>
           <a:p>
-            <a:fld id="{1D9FB36A-5F9F-4B65-8957-74C98912C7C4}" type="slidenum">
+            <a:fld id="{6C8B6F46-3B54-4263-97AC-F7539EEDB7F8}" type="slidenum">
               <a:rPr lang="en-US"/>
               <a:t>‹#›</a:t>
             </a:fld>
@@ -4974,7 +4974,7 @@
           <a:p>
             <a:r>
               <a:rPr lang="ko-KR"/>
-              <a:t>한가위에 내려가서 증권을 같이 봅니다</a:t>
+              <a:t>내려가서 증권을 같이 봅니다</a:t>
             </a:r>
           </a:p>
         </p:txBody>
@@ -4996,7 +4996,7 @@
           <a:p>
             <a:r>
               <a:rPr lang="ko-KR"/>
-              <a:t>부모님 점검 · 0000. 00. 00</a:t>
+              <a:t>부모님 점검 · 날짜 입력</a:t>
             </a:r>
           </a:p>
           <a:p>
@@ -5087,7 +5087,7 @@
           <a:bodyPr/>
           <a:lstStyle/>
           <a:p>
-            <a:fld id="{8707F6D6-2B9D-493D-BAA9-B6611AC31C68}" type="slidenum">
+            <a:fld id="{17CF4434-4D7D-47ED-B449-A4965CBE11E1}" type="slidenum">
               <a:rPr lang="en-US"/>
               <a:t>‹#›</a:t>
             </a:fld>
@@ -5800,7 +5800,7 @@
           <a:bodyPr/>
           <a:lstStyle/>
           <a:p>
-            <a:fld id="{7622E868-AFA2-4C8A-AC3C-22629F6241BE}" type="slidenum">
+            <a:fld id="{3B8C34A4-2E8D-4ACD-80B0-3F7C2CFE45A8}" type="slidenum">
               <a:rPr lang="en-US"/>
               <a:t>‹#›</a:t>
             </a:fld>
@@ -7306,7 +7306,7 @@
           <a:bodyPr/>
           <a:lstStyle/>
           <a:p>
-            <a:fld id="{31628FF6-877A-4521-A656-D71369F1C12A}" type="slidenum">
+            <a:fld id="{5802CDCB-D8D7-4208-B575-C79635BE4B3F}" type="slidenum">
               <a:rPr lang="en-US"/>
               <a:t>‹#›</a:t>
             </a:fld>
@@ -8856,7 +8856,7 @@
           <a:bodyPr/>
           <a:lstStyle/>
           <a:p>
-            <a:fld id="{14EA7A6C-18DE-4A90-B933-40372BD290E4}" type="slidenum">
+            <a:fld id="{619DE632-871B-44D8-A4D2-348314CA8937}" type="slidenum">
               <a:rPr lang="en-US"/>
               <a:t>‹#›</a:t>
             </a:fld>
@@ -9718,7 +9718,7 @@
           <a:bodyPr/>
           <a:lstStyle/>
           <a:p>
-            <a:fld id="{B2D5ACC2-9F80-480B-BA45-BC8966B852EF}" type="slidenum">
+            <a:fld id="{2F070C87-43A3-4B93-9E56-561F1327EFF0}" type="slidenum">
               <a:rPr lang="en-US"/>
               <a:t>‹#›</a:t>
             </a:fld>
